--- a/dist/초1/수학/수와연산/초1_수학_수와연산_12_두자리수의덧셈과뺄셈.pptx
+++ b/dist/초1/수학/수와연산/초1_수학_수와연산_12_두자리수의덧셈과뺄셈.pptx
@@ -121,13 +121,13 @@
   <p:extLst>
     <p:ext uri="{521415D9-36F7-43E2-AB2F-B90AF26B5E84}">
       <p14:sectionLst xmlns:p14="http://schemas.microsoft.com/office/powerpoint/2010/main">
-        <p14:section name="도입" id="{4b7dbd1b-f0d4-86e5-68f6-96081bb9eced}">
+        <p14:section name="도입" id="{e64d68cd-97b3-4236-2352-23f28b669c5b}">
           <p14:sldIdLst>
             <p14:sldId id="256"/>
             <p14:sldId id="257"/>
           </p14:sldIdLst>
         </p14:section>
-        <p14:section name="개념" id="{a553cd5d-05c6-b9c2-2102-970e96038f2f}">
+        <p14:section name="개념" id="{a863fa85-948c-1f2d-c0e9-8e32a97022d6}">
           <p14:sldIdLst>
             <p14:sldId id="258"/>
             <p14:sldId id="259"/>
@@ -136,32 +136,32 @@
             <p14:sldId id="263"/>
           </p14:sldIdLst>
         </p14:section>
-        <p14:section name="연습" id="{e3cebd1f-b3bd-2d72-5e35-9e42ccc8f614}">
+        <p14:section name="연습" id="{329fe7fe-6a8f-3b9a-115c-a2a9d431f48d}">
           <p14:sldIdLst>
             <p14:sldId id="261"/>
             <p14:sldId id="264"/>
             <p14:sldId id="265"/>
           </p14:sldIdLst>
         </p14:section>
-        <p14:section name="개념" id="{ff573a1e-d568-dc9d-2ecd-63b5c2f03a11}">
+        <p14:section name="개념" id="{0a6dc51e-a1ae-0152-ad56-87705176a76c}">
           <p14:sldIdLst/>
         </p14:section>
-        <p14:section name="연습" id="{5365aabf-51ce-1f8b-e864-77873f641202}">
+        <p14:section name="연습" id="{d0f49a6a-bf8f-fb0f-8621-e9f9c694622d}">
           <p14:sldIdLst/>
         </p14:section>
-        <p14:section name="확인" id="{157a5a2b-58bb-ae11-9887-e2bcf26ef3b6}">
+        <p14:section name="확인" id="{2bf25438-0e90-7dac-3e09-2998f87579ed}">
           <p14:sldIdLst>
             <p14:sldId id="266"/>
             <p14:sldId id="267"/>
             <p14:sldId id="268"/>
           </p14:sldIdLst>
         </p14:section>
-        <p14:section name="정리" id="{f59e4c3e-7dfc-a9ce-01c9-a9573daecfed}">
+        <p14:section name="정리" id="{53267aaa-0270-e3e3-096c-8f3fa90e1fcc}">
           <p14:sldIdLst>
             <p14:sldId id="269"/>
           </p14:sldIdLst>
         </p14:section>
-        <p14:section name="보충" id="{e1996e0a-228e-79ac-399c-65dfcea665ef}">
+        <p14:section name="보충" id="{222ca5d2-c4cb-a127-6e7b-58802beb5acd}">
           <p14:sldIdLst>
             <p14:sldId id="270"/>
           </p14:sldIdLst>

--- a/dist/초1/수학/수와연산/초1_수학_수와연산_12_두자리수의덧셈과뺄셈.pptx
+++ b/dist/초1/수학/수와연산/초1_수학_수와연산_12_두자리수의덧셈과뺄셈.pptx
@@ -121,13 +121,13 @@
   <p:extLst>
     <p:ext uri="{521415D9-36F7-43E2-AB2F-B90AF26B5E84}">
       <p14:sectionLst xmlns:p14="http://schemas.microsoft.com/office/powerpoint/2010/main">
-        <p14:section name="도입" id="{e64d68cd-97b3-4236-2352-23f28b669c5b}">
+        <p14:section name="도입" id="{bb87166e-01d7-274d-0140-70d6dcc0ed4f}">
           <p14:sldIdLst>
             <p14:sldId id="256"/>
             <p14:sldId id="257"/>
           </p14:sldIdLst>
         </p14:section>
-        <p14:section name="개념" id="{a863fa85-948c-1f2d-c0e9-8e32a97022d6}">
+        <p14:section name="개념" id="{bba9513f-2505-b081-96fb-22e7e88c60b1}">
           <p14:sldIdLst>
             <p14:sldId id="258"/>
             <p14:sldId id="259"/>
@@ -136,32 +136,32 @@
             <p14:sldId id="263"/>
           </p14:sldIdLst>
         </p14:section>
-        <p14:section name="연습" id="{329fe7fe-6a8f-3b9a-115c-a2a9d431f48d}">
+        <p14:section name="연습" id="{d422da58-5189-32aa-7646-fdbd893e1ab2}">
           <p14:sldIdLst>
             <p14:sldId id="261"/>
             <p14:sldId id="264"/>
             <p14:sldId id="265"/>
           </p14:sldIdLst>
         </p14:section>
-        <p14:section name="개념" id="{0a6dc51e-a1ae-0152-ad56-87705176a76c}">
+        <p14:section name="개념" id="{3b881067-caa9-3fec-af7d-7588a94e0d3c}">
           <p14:sldIdLst/>
         </p14:section>
-        <p14:section name="연습" id="{d0f49a6a-bf8f-fb0f-8621-e9f9c694622d}">
+        <p14:section name="연습" id="{055c5465-b182-7719-ef99-82d4a8fbf22a}">
           <p14:sldIdLst/>
         </p14:section>
-        <p14:section name="확인" id="{2bf25438-0e90-7dac-3e09-2998f87579ed}">
+        <p14:section name="확인" id="{78756358-d30c-84d6-2898-b10b338467c3}">
           <p14:sldIdLst>
             <p14:sldId id="266"/>
             <p14:sldId id="267"/>
             <p14:sldId id="268"/>
           </p14:sldIdLst>
         </p14:section>
-        <p14:section name="정리" id="{53267aaa-0270-e3e3-096c-8f3fa90e1fcc}">
+        <p14:section name="정리" id="{3e62a8c0-cb0e-7dcc-15d3-417696d0e915}">
           <p14:sldIdLst>
             <p14:sldId id="269"/>
           </p14:sldIdLst>
         </p14:section>
-        <p14:section name="보충" id="{222ca5d2-c4cb-a127-6e7b-58802beb5acd}">
+        <p14:section name="보충" id="{6e8dd96c-8d68-e7c2-816e-35f451ff54f9}">
           <p14:sldIdLst>
             <p14:sldId id="270"/>
           </p14:sldIdLst>

--- a/dist/초1/수학/수와연산/초1_수학_수와연산_12_두자리수의덧셈과뺄셈.pptx
+++ b/dist/초1/수학/수와연산/초1_수학_수와연산_12_두자리수의덧셈과뺄셈.pptx
@@ -121,13 +121,13 @@
   <p:extLst>
     <p:ext uri="{521415D9-36F7-43E2-AB2F-B90AF26B5E84}">
       <p14:sectionLst xmlns:p14="http://schemas.microsoft.com/office/powerpoint/2010/main">
-        <p14:section name="도입" id="{bb87166e-01d7-274d-0140-70d6dcc0ed4f}">
+        <p14:section name="도입" id="{dc7a9c5c-12d6-b590-00c6-41ee29f074e9}">
           <p14:sldIdLst>
             <p14:sldId id="256"/>
             <p14:sldId id="257"/>
           </p14:sldIdLst>
         </p14:section>
-        <p14:section name="개념" id="{bba9513f-2505-b081-96fb-22e7e88c60b1}">
+        <p14:section name="개념" id="{941929f3-79f3-9c04-f0ed-916c6f79515f}">
           <p14:sldIdLst>
             <p14:sldId id="258"/>
             <p14:sldId id="259"/>
@@ -136,32 +136,32 @@
             <p14:sldId id="263"/>
           </p14:sldIdLst>
         </p14:section>
-        <p14:section name="연습" id="{d422da58-5189-32aa-7646-fdbd893e1ab2}">
+        <p14:section name="연습" id="{b0942a0f-dafa-734d-e18e-490248d1c95c}">
           <p14:sldIdLst>
             <p14:sldId id="261"/>
             <p14:sldId id="264"/>
             <p14:sldId id="265"/>
           </p14:sldIdLst>
         </p14:section>
-        <p14:section name="개념" id="{3b881067-caa9-3fec-af7d-7588a94e0d3c}">
+        <p14:section name="개념" id="{a9b0babb-849f-2a85-f108-bec4a26026a4}">
           <p14:sldIdLst/>
         </p14:section>
-        <p14:section name="연습" id="{055c5465-b182-7719-ef99-82d4a8fbf22a}">
+        <p14:section name="연습" id="{40a56033-099e-3b2c-1943-413668e1c98d}">
           <p14:sldIdLst/>
         </p14:section>
-        <p14:section name="확인" id="{78756358-d30c-84d6-2898-b10b338467c3}">
+        <p14:section name="확인" id="{343cb472-b317-a9f4-f614-f121267e4380}">
           <p14:sldIdLst>
             <p14:sldId id="266"/>
             <p14:sldId id="267"/>
             <p14:sldId id="268"/>
           </p14:sldIdLst>
         </p14:section>
-        <p14:section name="정리" id="{3e62a8c0-cb0e-7dcc-15d3-417696d0e915}">
+        <p14:section name="정리" id="{6aa87574-10d0-dc9d-bc16-b4278bacd072}">
           <p14:sldIdLst>
             <p14:sldId id="269"/>
           </p14:sldIdLst>
         </p14:section>
-        <p14:section name="보충" id="{6e8dd96c-8d68-e7c2-816e-35f451ff54f9}">
+        <p14:section name="보충" id="{eea8a290-a457-ec12-bc96-f8055b1da208}">
           <p14:sldIdLst>
             <p14:sldId id="270"/>
           </p14:sldIdLst>
@@ -3072,7 +3072,7 @@
               <a:buNone/>
             </a:pPr>
             <a:r>
-              <a:rPr lang="ko-KR" altLang="en-US" sz="5000" b="1" dirty="0">
+              <a:rPr lang="ko-KR" altLang="en-US" sz="4800" b="1" dirty="0">
                 <a:solidFill>
                   <a:srgbClr val="FFFFFF"/>
                 </a:solidFill>
@@ -10986,7 +10986,7 @@
           </p:nvPr>
         </p:nvGraphicFramePr>
         <p:xfrm>
-          <a:off x="6813652" y="3111500"/>
+          <a:off x="6813652" y="3152140"/>
           <a:ext cx="4826660" cy="914400"/>
         </p:xfrm>
         <a:graphic>
@@ -10998,7 +10998,7 @@
                 <a:gridCol w="1608887"/>
                 <a:gridCol w="1608887"/>
               </a:tblGrid>
-              <a:tr h="650240">
+              <a:tr h="629920">
                 <a:tc>
                   <a:txBody>
                     <a:bodyPr/>
@@ -11193,7 +11193,7 @@
                   </a:tcPr>
                 </a:tc>
               </a:tr>
-              <a:tr h="650240">
+              <a:tr h="629920">
                 <a:tc>
                   <a:txBody>
                     <a:bodyPr/>
@@ -11388,7 +11388,7 @@
                   </a:tcPr>
                 </a:tc>
               </a:tr>
-              <a:tr h="650240">
+              <a:tr h="629920">
                 <a:tc>
                   <a:txBody>
                     <a:bodyPr/>
@@ -11594,7 +11594,7 @@
                   </a:tcPr>
                 </a:tc>
               </a:tr>
-              <a:tr h="650240">
+              <a:tr h="629920">
                 <a:tc>
                   <a:txBody>
                     <a:bodyPr/>
@@ -15512,7 +15512,7 @@
           </p:nvPr>
         </p:nvGraphicFramePr>
         <p:xfrm>
-          <a:off x="6813652" y="3111500"/>
+          <a:off x="6813652" y="3152140"/>
           <a:ext cx="4826660" cy="914400"/>
         </p:xfrm>
         <a:graphic>
@@ -15524,7 +15524,7 @@
                 <a:gridCol w="1608887"/>
                 <a:gridCol w="1608887"/>
               </a:tblGrid>
-              <a:tr h="650240">
+              <a:tr h="629920">
                 <a:tc>
                   <a:txBody>
                     <a:bodyPr/>
@@ -15719,7 +15719,7 @@
                   </a:tcPr>
                 </a:tc>
               </a:tr>
-              <a:tr h="650240">
+              <a:tr h="629920">
                 <a:tc>
                   <a:txBody>
                     <a:bodyPr/>
@@ -15914,7 +15914,7 @@
                   </a:tcPr>
                 </a:tc>
               </a:tr>
-              <a:tr h="650240">
+              <a:tr h="629920">
                 <a:tc>
                   <a:txBody>
                     <a:bodyPr/>
@@ -16120,7 +16120,7 @@
                   </a:tcPr>
                 </a:tc>
               </a:tr>
-              <a:tr h="650240">
+              <a:tr h="629920">
                 <a:tc>
                   <a:txBody>
                     <a:bodyPr/>
